--- a/Foundation_F3/Workshop/F3-W06_Apply_Workshop_L11-L12_Family_Home_Exchange.pptx
+++ b/Foundation_F3/Workshop/F3-W06_Apply_Workshop_L11-L12_Family_Home_Exchange.pptx
@@ -39601,14 +39601,14 @@
               <a:buNone/>
             </a:pPr>
             <a:r>
-              <a:rPr lang="en-US" sz="1000" b="1" spc="150" kern="0" dirty="0">
+              <a:rPr lang="en-US" sz="1000" b="1" spc="300" kern="0" dirty="0">
                 <a:solidFill>
                   <a:srgbClr val="2F6FB0"/>
                 </a:solidFill>
                 <a:latin typeface="Calibri" pitchFamily="34" charset="0"/>
                 <a:cs typeface="Amiri" pitchFamily="2" charset="-78"/>
               </a:rPr>
-              <a:t>PART 1 · STEP 2 · WHICH LESSON? · READ EACH CARD, THEN SORT IT</a:t>
+              <a:t>PART 1 · STEP 2 · SORT IT · READ EACH CARD, THEN SORT IT</a:t>
             </a:r>
             <a:endParaRPr lang="en-US" sz="1000" dirty="0"/>
           </a:p>
@@ -39685,7 +39685,7 @@
                 <a:ea typeface="Amiri" pitchFamily="2" charset="-78"/>
                 <a:cs typeface="Amiri" pitchFamily="2" charset="-78"/>
               </a:rPr>
-              <a:t>مِنْ أَيِّ دَرْسٍ؟</a:t>
+              <a:t>صَنِّفِ البِطَاقَاتِ</a:t>
             </a:r>
             <a:endParaRPr lang="ar-SA" sz="2800" dirty="0"/>
           </a:p>
@@ -40946,7 +40946,7 @@
                 <a:ea typeface="Amiri" pitchFamily="2" charset="-78"/>
                 <a:cs typeface="Amiri" pitchFamily="2" charset="-78"/>
               </a:rPr>
-              <a:t>مِنْ أَيِّ دَرْسٍ؟</a:t>
+              <a:t>صَنِّفِ البِطَاقَاتِ</a:t>
             </a:r>
             <a:endParaRPr lang="ar-SA" sz="2800" dirty="0"/>
           </a:p>

--- a/Foundation_F3/Workshop/F3-W06_Apply_Workshop_L11-L12_Family_Home_Exchange.pptx
+++ b/Foundation_F3/Workshop/F3-W06_Apply_Workshop_L11-L12_Family_Home_Exchange.pptx
@@ -5988,6 +5988,19 @@
               <a:buNone/>
             </a:pPr>
             <a:r>
+              <a:rPr lang="en-US" sz="1100" dirty="0">
+                <a:solidFill>
+                  <a:srgbClr val="5A6472"/>
+                </a:solidFill>
+                <a:latin typeface="Calibri" pitchFamily="34" charset="0"/>
+                <a:cs typeface="Amiri" pitchFamily="2" charset="-78"/>
+              </a:rPr>
+              <a:t>‏</a:t>
+            </a:r>
+            <a:pPr algn="l" indent="0" marL="0">
+              <a:buNone/>
+            </a:pPr>
+            <a:r>
               <a:rPr lang="ar-SA" altLang="en-US" sz="1450" dirty="0">
                 <a:solidFill>
                   <a:srgbClr val="5A6472"/>
@@ -6009,7 +6022,7 @@
                 <a:latin typeface="Calibri" pitchFamily="34" charset="0"/>
                 <a:cs typeface="Amiri" pitchFamily="2" charset="-78"/>
               </a:rPr>
-              <a:t> (show a photo)</a:t>
+              <a:t>‏ (show a photo)</a:t>
             </a:r>
             <a:endParaRPr lang="en-US" sz="1100" dirty="0"/>
           </a:p>
@@ -7445,7 +7458,7 @@
                 <a:latin typeface="Calibri" pitchFamily="34" charset="0"/>
                 <a:cs typeface="Amiri" pitchFamily="2" charset="-78"/>
               </a:rPr>
-              <a:t>Odd numbers come from F3-L11, even numbers from F3-L12. Core: a full sentence from the starter. Develop: add the “more” part. Stretch: link two answers with </a:t>
+              <a:t>Odd numbers come from F3-L11, even numbers from F3-L12. Core: a full sentence from the starter. Develop: add the “more” part. Stretch: link two answers with ‏</a:t>
             </a:r>
             <a:pPr algn="l" indent="0" marL="0">
               <a:buNone/>
@@ -7472,7 +7485,7 @@
                 <a:latin typeface="Calibri" pitchFamily="34" charset="0"/>
                 <a:cs typeface="Amiri" pitchFamily="2" charset="-78"/>
               </a:rPr>
-              <a:t>, </a:t>
+              <a:t>‏, ‏</a:t>
             </a:r>
             <a:pPr algn="l" indent="0" marL="0">
               <a:buNone/>
@@ -7499,7 +7512,7 @@
                 <a:latin typeface="Calibri" pitchFamily="34" charset="0"/>
                 <a:cs typeface="Amiri" pitchFamily="2" charset="-78"/>
               </a:rPr>
-              <a:t> or </a:t>
+              <a:t>‏ or ‏</a:t>
             </a:r>
             <a:pPr algn="l" indent="0" marL="0">
               <a:buNone/>
@@ -7526,7 +7539,7 @@
                 <a:latin typeface="Calibri" pitchFamily="34" charset="0"/>
                 <a:cs typeface="Amiri" pitchFamily="2" charset="-78"/>
               </a:rPr>
-              <a:t>. Swap after each question.</a:t>
+              <a:t>‏. Swap after each question.</a:t>
             </a:r>
             <a:endParaRPr lang="en-US" sz="1100" dirty="0"/>
           </a:p>
@@ -10849,7 +10862,7 @@
                 <a:latin typeface="Calibri" pitchFamily="34" charset="0"/>
                 <a:cs typeface="Amiri" pitchFamily="2" charset="-78"/>
               </a:rPr>
-              <a:t>Add colours that agree and near / far: </a:t>
+              <a:t>Add colours that agree and near / far: ‏</a:t>
             </a:r>
             <a:pPr algn="l" indent="0" marL="0">
               <a:buNone/>
@@ -10903,7 +10916,7 @@
                 <a:latin typeface="Calibri" pitchFamily="34" charset="0"/>
                 <a:cs typeface="Amiri" pitchFamily="2" charset="-78"/>
               </a:rPr>
-              <a:t>.</a:t>
+              <a:t>‏.</a:t>
             </a:r>
             <a:endParaRPr lang="en-US" sz="1150" dirty="0"/>
           </a:p>
@@ -11040,7 +11053,7 @@
                 <a:latin typeface="Calibri" pitchFamily="34" charset="0"/>
                 <a:cs typeface="Amiri" pitchFamily="2" charset="-78"/>
               </a:rPr>
-              <a:t>Persuade: </a:t>
+              <a:t>Persuade: ‏</a:t>
             </a:r>
             <a:pPr algn="l" indent="0" marL="0">
               <a:buNone/>
@@ -11067,7 +11080,7 @@
                 <a:latin typeface="Calibri" pitchFamily="34" charset="0"/>
                 <a:cs typeface="Amiri" pitchFamily="2" charset="-78"/>
               </a:rPr>
-              <a:t> … — and add a “but” (</a:t>
+              <a:t> …‏ — and add a “but” (‏</a:t>
             </a:r>
             <a:pPr algn="l" indent="0" marL="0">
               <a:buNone/>
@@ -11094,7 +11107,7 @@
                 <a:latin typeface="Calibri" pitchFamily="34" charset="0"/>
                 <a:cs typeface="Amiri" pitchFamily="2" charset="-78"/>
               </a:rPr>
-              <a:t>).</a:t>
+              <a:t>‏).</a:t>
             </a:r>
             <a:endParaRPr lang="en-US" sz="1150" dirty="0"/>
           </a:p>
@@ -17496,7 +17509,7 @@
                 <a:latin typeface="Calibri" pitchFamily="34" charset="0"/>
                 <a:cs typeface="Amiri" pitchFamily="2" charset="-78"/>
               </a:rPr>
-              <a:t>Woman → </a:t>
+              <a:t>Woman → ‏</a:t>
             </a:r>
             <a:pPr algn="l" indent="0" marL="0">
               <a:buNone/>
@@ -17523,7 +17536,7 @@
                 <a:latin typeface="Calibri" pitchFamily="34" charset="0"/>
                 <a:cs typeface="Amiri" pitchFamily="2" charset="-78"/>
               </a:rPr>
-              <a:t> + </a:t>
+              <a:t>‏ + ‏</a:t>
             </a:r>
             <a:pPr algn="l" indent="0" marL="0">
               <a:buNone/>
@@ -17550,7 +17563,7 @@
                 <a:latin typeface="Calibri" pitchFamily="34" charset="0"/>
                 <a:cs typeface="Amiri" pitchFamily="2" charset="-78"/>
               </a:rPr>
-              <a:t>.</a:t>
+              <a:t>‏.</a:t>
             </a:r>
             <a:endParaRPr lang="en-US" sz="1150" dirty="0"/>
           </a:p>
@@ -17754,6 +17767,19 @@
               <a:buNone/>
             </a:pPr>
             <a:r>
+              <a:rPr lang="en-US" sz="1150" b="1" dirty="0">
+                <a:solidFill>
+                  <a:srgbClr val="1B3B6F"/>
+                </a:solidFill>
+                <a:latin typeface="Calibri" pitchFamily="34" charset="0"/>
+                <a:cs typeface="Amiri" pitchFamily="2" charset="-78"/>
+              </a:rPr>
+              <a:t>‏</a:t>
+            </a:r>
+            <a:pPr algn="l" indent="0" marL="0">
+              <a:buNone/>
+            </a:pPr>
+            <a:r>
               <a:rPr lang="ar-SA" altLang="en-US" sz="1500" b="1" dirty="0">
                 <a:solidFill>
                   <a:srgbClr val="1B3B6F"/>
@@ -17775,7 +17801,7 @@
                 <a:latin typeface="Calibri" pitchFamily="34" charset="0"/>
                 <a:cs typeface="Amiri" pitchFamily="2" charset="-78"/>
               </a:rPr>
-              <a:t> (m.) → </a:t>
+              <a:t>‏ (m.) → ‏</a:t>
             </a:r>
             <a:pPr algn="l" indent="0" marL="0">
               <a:buNone/>
@@ -17802,7 +17828,7 @@
                 <a:latin typeface="Calibri" pitchFamily="34" charset="0"/>
                 <a:cs typeface="Amiri" pitchFamily="2" charset="-78"/>
               </a:rPr>
-              <a:t>.</a:t>
+              <a:t>‏.</a:t>
             </a:r>
             <a:endParaRPr lang="en-US" sz="1150" dirty="0"/>
           </a:p>
@@ -18013,7 +18039,7 @@
                 <a:latin typeface="Calibri" pitchFamily="34" charset="0"/>
                 <a:cs typeface="Amiri" pitchFamily="2" charset="-78"/>
               </a:rPr>
-              <a:t>Feminine noun → </a:t>
+              <a:t>Feminine noun → ‏</a:t>
             </a:r>
             <a:pPr algn="l" indent="0" marL="0">
               <a:buNone/>
@@ -18040,7 +18066,7 @@
                 <a:latin typeface="Calibri" pitchFamily="34" charset="0"/>
                 <a:cs typeface="Amiri" pitchFamily="2" charset="-78"/>
               </a:rPr>
-              <a:t>.</a:t>
+              <a:t>‏.</a:t>
             </a:r>
             <a:endParaRPr lang="en-US" sz="1150" dirty="0"/>
           </a:p>
@@ -20163,7 +20189,7 @@
                 <a:latin typeface="Calibri" pitchFamily="34" charset="0"/>
                 <a:cs typeface="Amiri" pitchFamily="2" charset="-78"/>
               </a:rPr>
-              <a:t>☐  At least one </a:t>
+              <a:t>☐  At least one ‏</a:t>
             </a:r>
             <a:pPr algn="l" indent="0" marL="0">
               <a:buNone/>
@@ -20190,7 +20216,7 @@
                 <a:latin typeface="Calibri" pitchFamily="34" charset="0"/>
                 <a:cs typeface="Amiri" pitchFamily="2" charset="-78"/>
               </a:rPr>
-              <a:t> and one </a:t>
+              <a:t>‏ and one ‏</a:t>
             </a:r>
             <a:pPr algn="l" indent="0" marL="0">
               <a:buNone/>
@@ -20217,7 +20243,7 @@
                 <a:latin typeface="Calibri" pitchFamily="34" charset="0"/>
                 <a:cs typeface="Amiri" pitchFamily="2" charset="-78"/>
               </a:rPr>
-              <a:t> (Develop).</a:t>
+              <a:t>‏ (Develop).</a:t>
             </a:r>
             <a:endParaRPr lang="en-US" sz="1200" dirty="0"/>
           </a:p>
@@ -23541,7 +23567,7 @@
                 <a:latin typeface="Calibri" pitchFamily="34" charset="0"/>
                 <a:cs typeface="Amiri" pitchFamily="2" charset="-78"/>
               </a:rPr>
-              <a:t>get </a:t>
+              <a:t>get ‏</a:t>
             </a:r>
             <a:pPr algn="l" indent="0" marL="0">
               <a:buNone/>
@@ -23568,7 +23594,7 @@
                 <a:latin typeface="Calibri" pitchFamily="34" charset="0"/>
                 <a:cs typeface="Amiri" pitchFamily="2" charset="-78"/>
               </a:rPr>
-              <a:t> and </a:t>
+              <a:t>‏ and ‏</a:t>
             </a:r>
             <a:pPr algn="l" indent="0" marL="0">
               <a:buNone/>
@@ -23595,7 +23621,7 @@
                 <a:latin typeface="Calibri" pitchFamily="34" charset="0"/>
                 <a:cs typeface="Amiri" pitchFamily="2" charset="-78"/>
               </a:rPr>
-              <a:t> right every time?</a:t>
+              <a:t>‏ right every time?</a:t>
             </a:r>
             <a:endParaRPr lang="en-US" sz="1100" dirty="0"/>
           </a:p>
@@ -23819,7 +23845,7 @@
                 <a:latin typeface="Calibri" pitchFamily="34" charset="0"/>
                 <a:cs typeface="Amiri" pitchFamily="2" charset="-78"/>
               </a:rPr>
-              <a:t>get the agreements right (people, colours, </a:t>
+              <a:t>get the agreements right (people, colours, ‏</a:t>
             </a:r>
             <a:pPr algn="l" indent="0" marL="0">
               <a:buNone/>
@@ -23846,7 +23872,7 @@
                 <a:latin typeface="Calibri" pitchFamily="34" charset="0"/>
                 <a:cs typeface="Amiri" pitchFamily="2" charset="-78"/>
               </a:rPr>
-              <a:t>)?</a:t>
+              <a:t>‏)?</a:t>
             </a:r>
             <a:endParaRPr lang="en-US" sz="1100" dirty="0"/>
           </a:p>
@@ -24005,7 +24031,7 @@
                 <a:latin typeface="Calibri" pitchFamily="34" charset="0"/>
                 <a:cs typeface="Amiri" pitchFamily="2" charset="-78"/>
               </a:rPr>
-              <a:t>use linking words (</a:t>
+              <a:t>use linking words (‏</a:t>
             </a:r>
             <a:pPr algn="l" indent="0" marL="0">
               <a:buNone/>
@@ -24113,7 +24139,7 @@
                 <a:latin typeface="Calibri" pitchFamily="34" charset="0"/>
                 <a:cs typeface="Amiri" pitchFamily="2" charset="-78"/>
               </a:rPr>
-              <a:t>)?</a:t>
+              <a:t>‏)?</a:t>
             </a:r>
             <a:endParaRPr lang="en-US" sz="1100" dirty="0"/>
           </a:p>
@@ -28059,7 +28085,7 @@
                 <a:latin typeface="Calibri" pitchFamily="34" charset="0"/>
                 <a:cs typeface="Amiri" pitchFamily="2" charset="-78"/>
               </a:rPr>
-              <a:t>I added reasons (</a:t>
+              <a:t>I added reasons (‏</a:t>
             </a:r>
             <a:pPr algn="l" indent="0" marL="0">
               <a:buNone/>
@@ -28086,7 +28112,7 @@
                 <a:latin typeface="Calibri" pitchFamily="34" charset="0"/>
                 <a:cs typeface="Amiri" pitchFamily="2" charset="-78"/>
               </a:rPr>
-              <a:t>) and extra details without frames.</a:t>
+              <a:t>‏) and extra details without frames.</a:t>
             </a:r>
             <a:endParaRPr lang="en-US" sz="1300" dirty="0"/>
           </a:p>
@@ -32214,7 +32240,7 @@
                 <a:latin typeface="Calibri" pitchFamily="34" charset="0"/>
                 <a:cs typeface="Amiri" pitchFamily="2" charset="-78"/>
               </a:rPr>
-              <a:t>☐  Add a reason (</a:t>
+              <a:t>☐  Add a reason (‏</a:t>
             </a:r>
             <a:pPr algn="l" indent="0" marL="0">
               <a:buNone/>
@@ -32241,7 +32267,7 @@
                 <a:latin typeface="Calibri" pitchFamily="34" charset="0"/>
                 <a:cs typeface="Amiri" pitchFamily="2" charset="-78"/>
               </a:rPr>
-              <a:t>) and an extra detail to every point.</a:t>
+              <a:t>‏) and an extra detail to every point.</a:t>
             </a:r>
             <a:endParaRPr lang="en-US" sz="1300" dirty="0"/>
           </a:p>
@@ -33762,7 +33788,7 @@
                 <a:latin typeface="Calibri" pitchFamily="34" charset="0"/>
                 <a:cs typeface="Amiri" pitchFamily="2" charset="-78"/>
               </a:rPr>
-              <a:t>Join a word from each lesson in one sentence with </a:t>
+              <a:t>Join a word from each lesson in one sentence with ‏</a:t>
             </a:r>
             <a:pPr algn="l" indent="0" marL="0">
               <a:buNone/>
@@ -33789,7 +33815,7 @@
                 <a:latin typeface="Calibri" pitchFamily="34" charset="0"/>
                 <a:cs typeface="Amiri" pitchFamily="2" charset="-78"/>
               </a:rPr>
-              <a:t> or </a:t>
+              <a:t>‏ or ‏</a:t>
             </a:r>
             <a:pPr algn="l" indent="0" marL="0">
               <a:buNone/>
@@ -33816,7 +33842,7 @@
                 <a:latin typeface="Calibri" pitchFamily="34" charset="0"/>
                 <a:cs typeface="Amiri" pitchFamily="2" charset="-78"/>
               </a:rPr>
-              <a:t>.</a:t>
+              <a:t>‏.</a:t>
             </a:r>
             <a:endParaRPr lang="en-US" sz="1150" dirty="0"/>
           </a:p>
